--- a/ДПО/Лекция.pptx
+++ b/ДПО/Лекция.pptx
@@ -313,7 +313,7 @@
             <a:fld id="{0FF7147C-2AAC-473E-AD87-1A0FFEE67DAA}" type="datetimeFigureOut">
               <a:rPr lang="ru-RU" smtClean="0"/>
               <a:pPr/>
-              <a:t>10.04.2026</a:t>
+              <a:t>13.04.2026</a:t>
             </a:fld>
             <a:endParaRPr lang="ru-RU" dirty="0"/>
           </a:p>
@@ -480,7 +480,7 @@
             <a:fld id="{0FF7147C-2AAC-473E-AD87-1A0FFEE67DAA}" type="datetimeFigureOut">
               <a:rPr lang="ru-RU" smtClean="0"/>
               <a:pPr/>
-              <a:t>10.04.2026</a:t>
+              <a:t>13.04.2026</a:t>
             </a:fld>
             <a:endParaRPr lang="ru-RU" dirty="0"/>
           </a:p>
@@ -657,7 +657,7 @@
             <a:fld id="{0FF7147C-2AAC-473E-AD87-1A0FFEE67DAA}" type="datetimeFigureOut">
               <a:rPr lang="ru-RU" smtClean="0"/>
               <a:pPr/>
-              <a:t>10.04.2026</a:t>
+              <a:t>13.04.2026</a:t>
             </a:fld>
             <a:endParaRPr lang="ru-RU" dirty="0"/>
           </a:p>
@@ -824,7 +824,7 @@
             <a:fld id="{0FF7147C-2AAC-473E-AD87-1A0FFEE67DAA}" type="datetimeFigureOut">
               <a:rPr lang="ru-RU" smtClean="0"/>
               <a:pPr/>
-              <a:t>10.04.2026</a:t>
+              <a:t>13.04.2026</a:t>
             </a:fld>
             <a:endParaRPr lang="ru-RU" dirty="0"/>
           </a:p>
@@ -1067,7 +1067,7 @@
             <a:fld id="{0FF7147C-2AAC-473E-AD87-1A0FFEE67DAA}" type="datetimeFigureOut">
               <a:rPr lang="ru-RU" smtClean="0"/>
               <a:pPr/>
-              <a:t>10.04.2026</a:t>
+              <a:t>13.04.2026</a:t>
             </a:fld>
             <a:endParaRPr lang="ru-RU" dirty="0"/>
           </a:p>
@@ -1352,7 +1352,7 @@
             <a:fld id="{0FF7147C-2AAC-473E-AD87-1A0FFEE67DAA}" type="datetimeFigureOut">
               <a:rPr lang="ru-RU" smtClean="0"/>
               <a:pPr/>
-              <a:t>10.04.2026</a:t>
+              <a:t>13.04.2026</a:t>
             </a:fld>
             <a:endParaRPr lang="ru-RU" dirty="0"/>
           </a:p>
@@ -1771,7 +1771,7 @@
             <a:fld id="{0FF7147C-2AAC-473E-AD87-1A0FFEE67DAA}" type="datetimeFigureOut">
               <a:rPr lang="ru-RU" smtClean="0"/>
               <a:pPr/>
-              <a:t>10.04.2026</a:t>
+              <a:t>13.04.2026</a:t>
             </a:fld>
             <a:endParaRPr lang="ru-RU" dirty="0"/>
           </a:p>
@@ -1886,7 +1886,7 @@
             <a:fld id="{0FF7147C-2AAC-473E-AD87-1A0FFEE67DAA}" type="datetimeFigureOut">
               <a:rPr lang="ru-RU" smtClean="0"/>
               <a:pPr/>
-              <a:t>10.04.2026</a:t>
+              <a:t>13.04.2026</a:t>
             </a:fld>
             <a:endParaRPr lang="ru-RU" dirty="0"/>
           </a:p>
@@ -1978,7 +1978,7 @@
             <a:fld id="{0FF7147C-2AAC-473E-AD87-1A0FFEE67DAA}" type="datetimeFigureOut">
               <a:rPr lang="ru-RU" smtClean="0"/>
               <a:pPr/>
-              <a:t>10.04.2026</a:t>
+              <a:t>13.04.2026</a:t>
             </a:fld>
             <a:endParaRPr lang="ru-RU" dirty="0"/>
           </a:p>
@@ -2252,7 +2252,7 @@
             <a:fld id="{0FF7147C-2AAC-473E-AD87-1A0FFEE67DAA}" type="datetimeFigureOut">
               <a:rPr lang="ru-RU" smtClean="0"/>
               <a:pPr/>
-              <a:t>10.04.2026</a:t>
+              <a:t>13.04.2026</a:t>
             </a:fld>
             <a:endParaRPr lang="ru-RU" dirty="0"/>
           </a:p>
@@ -2502,7 +2502,7 @@
             <a:fld id="{0FF7147C-2AAC-473E-AD87-1A0FFEE67DAA}" type="datetimeFigureOut">
               <a:rPr lang="ru-RU" smtClean="0"/>
               <a:pPr/>
-              <a:t>10.04.2026</a:t>
+              <a:t>13.04.2026</a:t>
             </a:fld>
             <a:endParaRPr lang="ru-RU" dirty="0"/>
           </a:p>
@@ -2712,7 +2712,7 @@
             <a:fld id="{0FF7147C-2AAC-473E-AD87-1A0FFEE67DAA}" type="datetimeFigureOut">
               <a:rPr lang="ru-RU" smtClean="0"/>
               <a:pPr/>
-              <a:t>10.04.2026</a:t>
+              <a:t>13.04.2026</a:t>
             </a:fld>
             <a:endParaRPr lang="ru-RU" dirty="0"/>
           </a:p>
@@ -4361,7 +4361,7 @@
         </p:blipFill>
         <p:spPr bwMode="auto">
           <a:xfrm>
-            <a:off x="4286248" y="1714488"/>
+            <a:off x="4286248" y="1774721"/>
             <a:ext cx="4857752" cy="1940031"/>
           </a:xfrm>
           <a:prstGeom prst="rect">
@@ -8811,7 +8811,7 @@
         </p:nvSpPr>
         <p:spPr>
           <a:xfrm>
-            <a:off x="0" y="2828836"/>
+            <a:off x="0" y="2681583"/>
             <a:ext cx="9144000" cy="461665"/>
           </a:xfrm>
           <a:prstGeom prst="rect">
@@ -8852,7 +8852,7 @@
         </p:blipFill>
         <p:spPr bwMode="auto">
           <a:xfrm>
-            <a:off x="471517" y="3357562"/>
+            <a:off x="471517" y="3071810"/>
             <a:ext cx="8315325" cy="2914650"/>
           </a:xfrm>
           <a:prstGeom prst="rect">
@@ -8868,6 +8868,42 @@
           <a:effectLst/>
         </p:spPr>
       </p:pic>
+      <p:sp>
+        <p:nvSpPr>
+          <p:cNvPr id="7" name="Прямоугольник 6"/>
+          <p:cNvSpPr/>
+          <p:nvPr/>
+        </p:nvSpPr>
+        <p:spPr>
+          <a:xfrm>
+            <a:off x="1571604" y="6072206"/>
+            <a:ext cx="6213560" cy="461665"/>
+          </a:xfrm>
+          <a:prstGeom prst="rect">
+            <a:avLst/>
+          </a:prstGeom>
+        </p:spPr>
+        <p:txBody>
+          <a:bodyPr wrap="none">
+            <a:spAutoFit/>
+          </a:bodyPr>
+          <a:lstStyle/>
+          <a:p>
+            <a:r>
+              <a:rPr lang="en-US" sz="2400" b="1" dirty="0" smtClean="0">
+                <a:latin typeface="Times New Roman" pitchFamily="18" charset="0"/>
+                <a:cs typeface="Times New Roman" pitchFamily="18" charset="0"/>
+                <a:hlinkClick r:id="rId4"/>
+              </a:rPr>
+              <a:t>https://disk.360.yandex.ru/d/yjZ_BvgldRezNg</a:t>
+            </a:r>
+            <a:endParaRPr lang="en-US" sz="2400" b="1" dirty="0" smtClean="0">
+              <a:latin typeface="Times New Roman" pitchFamily="18" charset="0"/>
+              <a:cs typeface="Times New Roman" pitchFamily="18" charset="0"/>
+            </a:endParaRPr>
+          </a:p>
+        </p:txBody>
+      </p:sp>
     </p:spTree>
   </p:cSld>
   <p:clrMapOvr>
